--- a/assets/SuperTemplate_36type.pptx
+++ b/assets/SuperTemplate_36type.pptx
@@ -4154,7 +4154,7 @@
                 <a:ea typeface="Yu Gothic" pitchFamily="34" charset="-122"/>
                 <a:cs typeface="Yu Gothic" pitchFamily="34" charset="-120"/>
               </a:rPr>
-              <a:t>スーパーテンプレ 38型</a:t>
+              <a:t>スーパーテンプレ</a:t>
             </a:r>
             <a:endParaRPr lang="en-US" sz="3800" dirty="0"/>
           </a:p>
@@ -4193,7 +4193,7 @@
                 <a:ea typeface="Yu Gothic" pitchFamily="34" charset="-122"/>
                 <a:cs typeface="Yu Gothic" pitchFamily="34" charset="-120"/>
               </a:rPr>
-              <a:t>実測38のスライド型 | コピーして文言を差し替えて使う</a:t>
+              <a:t>SlideSpec 36型の見本帳 | 型は発想帳。合わなければ自由記述パーツで組む</a:t>
             </a:r>
             <a:endParaRPr lang="en-US" sz="1400" dirty="0"/>
           </a:p>
@@ -6115,7 +6115,7 @@
                           <a:ea typeface="Yu Gothic" pitchFamily="34" charset="-122"/>
                           <a:cs typeface="Yu Gothic" pitchFamily="34" charset="-120"/>
                         </a:rPr>
-                        <a:t>他社</a:t>
+                        <a:t>競合</a:t>
                       </a:r>
                       <a:endParaRPr lang="en-US" sz="1250" dirty="0">
                         <a:latin typeface="Yu Gothic" charset="0"/>
@@ -6162,7 +6162,7 @@
                           <a:ea typeface="Yu Gothic" pitchFamily="34" charset="-122"/>
                           <a:cs typeface="Yu Gothic" pitchFamily="34" charset="-120"/>
                         </a:rPr>
-                        <a:t>読み取り</a:t>
+                        <a:t>含意</a:t>
                       </a:r>
                       <a:endParaRPr lang="en-US" sz="1250" dirty="0">
                         <a:latin typeface="Yu Gothic" charset="0"/>
@@ -7298,7 +7298,7 @@
                           <a:ea typeface="Yu Gothic" pitchFamily="34" charset="-122"/>
                           <a:cs typeface="Yu Gothic" pitchFamily="34" charset="-120"/>
                         </a:rPr>
-                        <a:t>置いた前提</a:t>
+                        <a:t>前提</a:t>
                       </a:r>
                       <a:endParaRPr lang="en-US" sz="1250" dirty="0">
                         <a:latin typeface="Yu Gothic" charset="0"/>
@@ -7345,7 +7345,7 @@
                           <a:ea typeface="Yu Gothic" pitchFamily="34" charset="-122"/>
                           <a:cs typeface="Yu Gothic" pitchFamily="34" charset="-120"/>
                         </a:rPr>
-                        <a:t>経営の打ち手</a:t>
+                        <a:t>経営への含意</a:t>
                       </a:r>
                       <a:endParaRPr lang="en-US" sz="1250" dirty="0">
                         <a:latin typeface="Yu Gothic" charset="0"/>
@@ -8503,7 +8503,7 @@
                           <a:ea typeface="Yu Gothic" pitchFamily="34" charset="-122"/>
                           <a:cs typeface="Yu Gothic" pitchFamily="34" charset="-120"/>
                         </a:rPr>
-                        <a:t>見るべき兆候</a:t>
+                        <a:t>兆候</a:t>
                       </a:r>
                       <a:endParaRPr lang="en-US" sz="1250" dirty="0">
                         <a:latin typeface="Yu Gothic" charset="0"/>
@@ -8550,7 +8550,7 @@
                           <a:ea typeface="Yu Gothic" pitchFamily="34" charset="-122"/>
                           <a:cs typeface="Yu Gothic" pitchFamily="34" charset="-120"/>
                         </a:rPr>
-                        <a:t>打ち手</a:t>
+                        <a:t>対応策</a:t>
                       </a:r>
                       <a:endParaRPr lang="en-US" sz="1250" dirty="0">
                         <a:latin typeface="Yu Gothic" charset="0"/>
@@ -16308,7 +16308,7 @@
                 <a:ea typeface="Yu Gothic" pitchFamily="34" charset="-122"/>
                 <a:cs typeface="Yu Gothic" pitchFamily="34" charset="-120"/>
               </a:rPr>
-              <a:t>Phase</a:t>
+              <a:t>段階</a:t>
             </a:r>
             <a:endParaRPr lang="en-US" sz="1250" dirty="0"/>
           </a:p>
@@ -22228,7 +22228,7 @@
                 <a:ea typeface="Yu Gothic" pitchFamily="34" charset="-122"/>
                 <a:cs typeface="Yu Gothic" pitchFamily="34" charset="-120"/>
               </a:rPr>
-              <a:t>Issue</a:t>
+              <a:t>課題</a:t>
             </a:r>
             <a:endParaRPr lang="en-US" sz="1400" dirty="0"/>
           </a:p>
@@ -22292,7 +22292,7 @@
                 <a:ea typeface="Yu Gothic" pitchFamily="34" charset="-122"/>
                 <a:cs typeface="Yu Gothic" pitchFamily="34" charset="-120"/>
               </a:rPr>
-              <a:t>Resolution</a:t>
+              <a:t>打ち手</a:t>
             </a:r>
             <a:endParaRPr lang="en-US" sz="1400" dirty="0"/>
           </a:p>
@@ -36850,10 +36850,8 @@
             <a:off x="3813048" y="3144883"/>
             <a:ext cx="580111" cy="201168"/>
           </a:xfrm>
-          <a:prstGeom prst="roundRect">
-            <a:avLst>
-              <a:gd name="adj" fmla="val 18182"/>
-            </a:avLst>
+          <a:prstGeom prst="rect">
+            <a:avLst/>
           </a:prstGeom>
           <a:solidFill>
             <a:srgbClr val="79C8DC"/>
@@ -36977,10 +36975,8 @@
             <a:off x="4466311" y="3600777"/>
             <a:ext cx="1233373" cy="201168"/>
           </a:xfrm>
-          <a:prstGeom prst="roundRect">
-            <a:avLst>
-              <a:gd name="adj" fmla="val 18182"/>
-            </a:avLst>
+          <a:prstGeom prst="rect">
+            <a:avLst/>
           </a:prstGeom>
           <a:solidFill>
             <a:srgbClr val="79C8DC"/>
@@ -37104,10 +37100,8 @@
             <a:off x="5119573" y="4056670"/>
             <a:ext cx="580111" cy="201168"/>
           </a:xfrm>
-          <a:prstGeom prst="roundRect">
-            <a:avLst>
-              <a:gd name="adj" fmla="val 18182"/>
-            </a:avLst>
+          <a:prstGeom prst="rect">
+            <a:avLst/>
           </a:prstGeom>
           <a:solidFill>
             <a:srgbClr val="1E5F8C"/>
@@ -37231,10 +37225,8 @@
             <a:off x="5772836" y="4512564"/>
             <a:ext cx="1233373" cy="201168"/>
           </a:xfrm>
-          <a:prstGeom prst="roundRect">
-            <a:avLst>
-              <a:gd name="adj" fmla="val 18182"/>
-            </a:avLst>
+          <a:prstGeom prst="rect">
+            <a:avLst/>
           </a:prstGeom>
           <a:solidFill>
             <a:srgbClr val="1E5F8C"/>
@@ -37358,10 +37350,8 @@
             <a:off x="6426098" y="4968458"/>
             <a:ext cx="1233373" cy="201168"/>
           </a:xfrm>
-          <a:prstGeom prst="roundRect">
-            <a:avLst>
-              <a:gd name="adj" fmla="val 18182"/>
-            </a:avLst>
+          <a:prstGeom prst="rect">
+            <a:avLst/>
           </a:prstGeom>
           <a:solidFill>
             <a:srgbClr val="1E5F8C"/>
@@ -37485,10 +37475,8 @@
             <a:off x="9039149" y="5424351"/>
             <a:ext cx="1233373" cy="201168"/>
           </a:xfrm>
-          <a:prstGeom prst="roundRect">
-            <a:avLst>
-              <a:gd name="adj" fmla="val 18182"/>
-            </a:avLst>
+          <a:prstGeom prst="rect">
+            <a:avLst/>
           </a:prstGeom>
           <a:solidFill>
             <a:srgbClr val="071B2C"/>
@@ -38001,7 +37989,7 @@
                 <a:ea typeface="Yu Gothic" pitchFamily="34" charset="-122"/>
                 <a:cs typeface="Yu Gothic" pitchFamily="34" charset="-120"/>
               </a:rPr>
-              <a:t>RECOMMENDED DECISION</a:t>
+              <a:t>推奨する意思決定</a:t>
             </a:r>
             <a:endParaRPr lang="en-US" sz="1050" dirty="0"/>
           </a:p>
